--- a/BACKUP&RECOVERY/17장/17장_데이터베이스_복제.pptx
+++ b/BACKUP&RECOVERY/17장/17장_데이터베이스_복제.pptx
@@ -8924,7 +8924,7 @@
                 <a:latin typeface="Consolas"/>
                 <a:ea typeface="Consolas"/>
               </a:rPr>
-              <a:t>*.log_file_name_convert=('/u01/app/oracle/oradata/ORCL/','/u04/newdb/NEWDB/')</a:t>
+              <a:t>*.log_file_name_convert=('/u01/app/oracle/oradata/orcl/','/u04/newdb/NEWDB/')</a:t>
             </a:r>
           </a:p>
         </p:txBody>
@@ -18371,7 +18371,7 @@
                 <a:latin typeface="Consolas"/>
                 <a:ea typeface="Consolas"/>
               </a:rPr>
-              <a:t>[oracle@oel7v9r1 ~]$ cp -p /u02/arch1/*.dbf /u04/clone/arch/</a:t>
+              <a:t>[oracle@oel7v9r1 ~]$ cp -p /home/oracle/arch1/*.dbf /u04/clone/arch/</a:t>
             </a:r>
           </a:p>
           <a:p>
